--- a/lectures/Lecture_06/slides/Lecture_06_Modern_CNN_Architectures_and_Transfer_Learning.pptx
+++ b/lectures/Lecture_06/slides/Lecture_06_Modern_CNN_Architectures_and_Transfer_Learning.pptx
@@ -7203,8 +7203,8 @@
         </p:nvSpPr>
         <p:spPr>
           <a:xfrm>
-            <a:off x="658368" y="1883664"/>
-            <a:ext cx="146304" cy="146304"/>
+            <a:off x="658368" y="1837944"/>
+            <a:ext cx="128016" cy="128016"/>
           </a:xfrm>
           <a:prstGeom prst="rect">
             <a:avLst/>
@@ -7247,8 +7247,8 @@
         </p:nvSpPr>
         <p:spPr>
           <a:xfrm>
-            <a:off x="1042416" y="1700784"/>
-            <a:ext cx="10490911" cy="640080"/>
+            <a:off x="1024128" y="1691640"/>
+            <a:ext cx="10509199" cy="658368"/>
           </a:xfrm>
           <a:prstGeom prst="rect">
             <a:avLst/>
@@ -7289,8 +7289,8 @@
         </p:nvSpPr>
         <p:spPr>
           <a:xfrm>
-            <a:off x="658368" y="2596896"/>
-            <a:ext cx="146304" cy="146304"/>
+            <a:off x="658368" y="2551176"/>
+            <a:ext cx="128016" cy="128016"/>
           </a:xfrm>
           <a:prstGeom prst="rect">
             <a:avLst/>
@@ -7333,8 +7333,8 @@
         </p:nvSpPr>
         <p:spPr>
           <a:xfrm>
-            <a:off x="1042416" y="2414016"/>
-            <a:ext cx="10490911" cy="640080"/>
+            <a:off x="1024128" y="2404872"/>
+            <a:ext cx="10509199" cy="658368"/>
           </a:xfrm>
           <a:prstGeom prst="rect">
             <a:avLst/>
@@ -7375,8 +7375,8 @@
         </p:nvSpPr>
         <p:spPr>
           <a:xfrm>
-            <a:off x="658368" y="3310128"/>
-            <a:ext cx="146304" cy="146304"/>
+            <a:off x="658368" y="3264408"/>
+            <a:ext cx="128016" cy="128016"/>
           </a:xfrm>
           <a:prstGeom prst="rect">
             <a:avLst/>
@@ -7419,8 +7419,8 @@
         </p:nvSpPr>
         <p:spPr>
           <a:xfrm>
-            <a:off x="1042416" y="3127248"/>
-            <a:ext cx="10490911" cy="640080"/>
+            <a:off x="1024128" y="3118104"/>
+            <a:ext cx="10509199" cy="658368"/>
           </a:xfrm>
           <a:prstGeom prst="rect">
             <a:avLst/>
@@ -7461,8 +7461,8 @@
         </p:nvSpPr>
         <p:spPr>
           <a:xfrm>
-            <a:off x="658368" y="4023360"/>
-            <a:ext cx="146304" cy="146304"/>
+            <a:off x="658368" y="3977640"/>
+            <a:ext cx="128016" cy="128016"/>
           </a:xfrm>
           <a:prstGeom prst="rect">
             <a:avLst/>
@@ -7505,8 +7505,8 @@
         </p:nvSpPr>
         <p:spPr>
           <a:xfrm>
-            <a:off x="1042416" y="3840480"/>
-            <a:ext cx="10490911" cy="640080"/>
+            <a:off x="1024128" y="3831336"/>
+            <a:ext cx="10509199" cy="658368"/>
           </a:xfrm>
           <a:prstGeom prst="rect">
             <a:avLst/>
@@ -7547,8 +7547,8 @@
         </p:nvSpPr>
         <p:spPr>
           <a:xfrm>
-            <a:off x="658368" y="4736592"/>
-            <a:ext cx="146304" cy="146304"/>
+            <a:off x="658368" y="4690872"/>
+            <a:ext cx="128016" cy="128016"/>
           </a:xfrm>
           <a:prstGeom prst="rect">
             <a:avLst/>
@@ -7591,8 +7591,8 @@
         </p:nvSpPr>
         <p:spPr>
           <a:xfrm>
-            <a:off x="1042416" y="4553712"/>
-            <a:ext cx="10490911" cy="640080"/>
+            <a:off x="1024128" y="4544568"/>
+            <a:ext cx="10509199" cy="658368"/>
           </a:xfrm>
           <a:prstGeom prst="rect">
             <a:avLst/>
@@ -8563,8 +8563,8 @@
         </p:nvSpPr>
         <p:spPr>
           <a:xfrm>
-            <a:off x="658368" y="1764792"/>
-            <a:ext cx="502920" cy="457200"/>
+            <a:off x="658368" y="1728216"/>
+            <a:ext cx="502920" cy="530352"/>
           </a:xfrm>
           <a:prstGeom prst="rect">
             <a:avLst/>
@@ -8605,8 +8605,8 @@
         </p:nvSpPr>
         <p:spPr>
           <a:xfrm>
-            <a:off x="1344168" y="1783080"/>
-            <a:ext cx="10189159" cy="457200"/>
+            <a:off x="1344168" y="1728216"/>
+            <a:ext cx="10189159" cy="530352"/>
           </a:xfrm>
           <a:prstGeom prst="rect">
             <a:avLst/>
@@ -8647,7 +8647,7 @@
         </p:nvSpPr>
         <p:spPr>
           <a:xfrm>
-            <a:off x="658368" y="2267712"/>
+            <a:off x="658368" y="2276856"/>
             <a:ext cx="10874959" cy="9525"/>
           </a:xfrm>
           <a:prstGeom prst="rect">
@@ -8691,8 +8691,8 @@
         </p:nvSpPr>
         <p:spPr>
           <a:xfrm>
-            <a:off x="658368" y="2368296"/>
-            <a:ext cx="502920" cy="457200"/>
+            <a:off x="658368" y="2331720"/>
+            <a:ext cx="502920" cy="530352"/>
           </a:xfrm>
           <a:prstGeom prst="rect">
             <a:avLst/>
@@ -8733,8 +8733,8 @@
         </p:nvSpPr>
         <p:spPr>
           <a:xfrm>
-            <a:off x="1344168" y="2386584"/>
-            <a:ext cx="10189159" cy="457200"/>
+            <a:off x="1344168" y="2331720"/>
+            <a:ext cx="10189159" cy="530352"/>
           </a:xfrm>
           <a:prstGeom prst="rect">
             <a:avLst/>
@@ -8775,7 +8775,7 @@
         </p:nvSpPr>
         <p:spPr>
           <a:xfrm>
-            <a:off x="658368" y="2871216"/>
+            <a:off x="658368" y="2880360"/>
             <a:ext cx="10874959" cy="9525"/>
           </a:xfrm>
           <a:prstGeom prst="rect">
@@ -8819,8 +8819,8 @@
         </p:nvSpPr>
         <p:spPr>
           <a:xfrm>
-            <a:off x="658368" y="2971800"/>
-            <a:ext cx="502920" cy="457200"/>
+            <a:off x="658368" y="2935224"/>
+            <a:ext cx="502920" cy="530352"/>
           </a:xfrm>
           <a:prstGeom prst="rect">
             <a:avLst/>
@@ -8861,8 +8861,8 @@
         </p:nvSpPr>
         <p:spPr>
           <a:xfrm>
-            <a:off x="1344168" y="2990088"/>
-            <a:ext cx="10189159" cy="457200"/>
+            <a:off x="1344168" y="2935224"/>
+            <a:ext cx="10189159" cy="530352"/>
           </a:xfrm>
           <a:prstGeom prst="rect">
             <a:avLst/>
@@ -8903,7 +8903,7 @@
         </p:nvSpPr>
         <p:spPr>
           <a:xfrm>
-            <a:off x="658368" y="3474720"/>
+            <a:off x="658368" y="3483864"/>
             <a:ext cx="10874959" cy="9525"/>
           </a:xfrm>
           <a:prstGeom prst="rect">
@@ -8947,8 +8947,8 @@
         </p:nvSpPr>
         <p:spPr>
           <a:xfrm>
-            <a:off x="658368" y="3575304"/>
-            <a:ext cx="502920" cy="457200"/>
+            <a:off x="658368" y="3538728"/>
+            <a:ext cx="502920" cy="530352"/>
           </a:xfrm>
           <a:prstGeom prst="rect">
             <a:avLst/>
@@ -8989,8 +8989,8 @@
         </p:nvSpPr>
         <p:spPr>
           <a:xfrm>
-            <a:off x="1344168" y="3593592"/>
-            <a:ext cx="10189159" cy="457200"/>
+            <a:off x="1344168" y="3538728"/>
+            <a:ext cx="10189159" cy="530352"/>
           </a:xfrm>
           <a:prstGeom prst="rect">
             <a:avLst/>
@@ -9031,7 +9031,7 @@
         </p:nvSpPr>
         <p:spPr>
           <a:xfrm>
-            <a:off x="658368" y="4078224"/>
+            <a:off x="658368" y="4087368"/>
             <a:ext cx="10874959" cy="9525"/>
           </a:xfrm>
           <a:prstGeom prst="rect">
@@ -9075,8 +9075,8 @@
         </p:nvSpPr>
         <p:spPr>
           <a:xfrm>
-            <a:off x="658368" y="4178808"/>
-            <a:ext cx="502920" cy="457200"/>
+            <a:off x="658368" y="4142232"/>
+            <a:ext cx="502920" cy="530352"/>
           </a:xfrm>
           <a:prstGeom prst="rect">
             <a:avLst/>
@@ -9117,8 +9117,8 @@
         </p:nvSpPr>
         <p:spPr>
           <a:xfrm>
-            <a:off x="1344168" y="4197096"/>
-            <a:ext cx="10189159" cy="457200"/>
+            <a:off x="1344168" y="4142232"/>
+            <a:ext cx="10189159" cy="530352"/>
           </a:xfrm>
           <a:prstGeom prst="rect">
             <a:avLst/>
@@ -9159,7 +9159,7 @@
         </p:nvSpPr>
         <p:spPr>
           <a:xfrm>
-            <a:off x="658368" y="4681728"/>
+            <a:off x="658368" y="4690872"/>
             <a:ext cx="10874959" cy="9525"/>
           </a:xfrm>
           <a:prstGeom prst="rect">
@@ -9203,8 +9203,8 @@
         </p:nvSpPr>
         <p:spPr>
           <a:xfrm>
-            <a:off x="658368" y="4892040"/>
-            <a:ext cx="10874959" cy="457200"/>
+            <a:off x="658368" y="4818888"/>
+            <a:ext cx="10874959" cy="411480"/>
           </a:xfrm>
           <a:prstGeom prst="rect">
             <a:avLst/>
@@ -9226,7 +9226,7 @@
               </a:spcAft>
             </a:pPr>
             <a:r>
-              <a:rPr sz="1400" b="0" i="1">
+              <a:rPr sz="1300" b="0" i="1">
                 <a:solidFill>
                   <a:srgbClr val="5A6375"/>
                 </a:solidFill>
